--- a/答辩PPT-恶意攻击行为溯源分析系统-第11页修订.pptx
+++ b/答辩PPT-恶意攻击行为溯源分析系统-第11页修订.pptx
@@ -4599,7 +4599,7 @@
                 </a:solidFill>
                 <a:latin typeface="微软雅黑" panose="020B0503020204020204" charset="-122"/>
               </a:rPr>
-              <a:t>✓ 31 种标准事件类型，时间统一 UTC+8</a:t>
+              <a:t>✓ 33 种标准事件类型，时间统一 UTC+8</a:t>
             </a:r>
             <a:endParaRPr sz="1350" b="0">
               <a:solidFill>
@@ -4689,7 +4689,7 @@
                 </a:solidFill>
                 <a:latin typeface="微软雅黑" panose="020B0503020204020204" charset="-122"/>
               </a:rPr>
-              <a:t>✓ 异常预标记 5 规则：实测标记 9 条（爆破×3·远程下载×6）</a:t>
+              <a:t>✓ 异常预标记 8 规则：实测标记 9 条（爆破×3·远程下载×6）</a:t>
             </a:r>
             <a:endParaRPr sz="1350" b="0">
               <a:solidFill>
@@ -9882,7 +9882,7 @@
                 </a:solidFill>
                 <a:latin typeface="微软雅黑" panose="020B0503020204020204" charset="-122"/>
               </a:rPr>
-              <a:t>✓ B 31 类型 · C 10 检测器 · D 9 阶段关联</a:t>
+              <a:t>✓ B 33 类型 · C 10 检测器 · D 9 阶段关联</a:t>
             </a:r>
             <a:endParaRPr sz="1600" b="0">
               <a:solidFill>
@@ -10153,7 +10153,7 @@
                 </a:solidFill>
                 <a:latin typeface="微软雅黑" panose="020B0503020204020204" charset="-122"/>
               </a:rPr>
-              <a:t>▸ 主机侧深挖：内存注入 / 反射加载</a:t>
+              <a:t>内存镜像取证：YARA 扫描</a:t>
             </a:r>
             <a:endParaRPr sz="1600" b="0">
               <a:solidFill>
@@ -11601,7 +11601,7 @@
                   </a:solidFill>
                   <a:latin typeface="微软雅黑" panose="020B0503020204020204" charset="-122"/>
                 </a:rPr>
-                <a:t>31 种事件类型</a:t>
+                <a:t>33 种事件类型</a:t>
               </a:r>
               <a:endParaRPr sz="1400" b="0">
                 <a:solidFill>
